--- a/Vigneshbabu_Credit_MUC02.pptx
+++ b/Vigneshbabu_Credit_MUC02.pptx
@@ -5,7 +5,7 @@
     <p:sldMasterId id="2147483648" r:id="rId1"/>
   </p:sldMasterIdLst>
   <p:notesMasterIdLst>
-    <p:notesMasterId r:id="rId30"/>
+    <p:notesMasterId r:id="rId31"/>
   </p:notesMasterIdLst>
   <p:sldIdLst>
     <p:sldId id="256" r:id="rId2"/>
@@ -14,28 +14,29 @@
     <p:sldId id="258" r:id="rId5"/>
     <p:sldId id="259" r:id="rId6"/>
     <p:sldId id="260" r:id="rId7"/>
-    <p:sldId id="261" r:id="rId8"/>
-    <p:sldId id="262" r:id="rId9"/>
-    <p:sldId id="263" r:id="rId10"/>
-    <p:sldId id="264" r:id="rId11"/>
-    <p:sldId id="265" r:id="rId12"/>
-    <p:sldId id="266" r:id="rId13"/>
-    <p:sldId id="267" r:id="rId14"/>
-    <p:sldId id="268" r:id="rId15"/>
-    <p:sldId id="269" r:id="rId16"/>
-    <p:sldId id="270" r:id="rId17"/>
-    <p:sldId id="271" r:id="rId18"/>
-    <p:sldId id="272" r:id="rId19"/>
-    <p:sldId id="273" r:id="rId20"/>
-    <p:sldId id="274" r:id="rId21"/>
-    <p:sldId id="275" r:id="rId22"/>
-    <p:sldId id="276" r:id="rId23"/>
-    <p:sldId id="277" r:id="rId24"/>
-    <p:sldId id="278" r:id="rId25"/>
-    <p:sldId id="279" r:id="rId26"/>
-    <p:sldId id="280" r:id="rId27"/>
-    <p:sldId id="281" r:id="rId28"/>
-    <p:sldId id="282" r:id="rId29"/>
+    <p:sldId id="284" r:id="rId8"/>
+    <p:sldId id="261" r:id="rId9"/>
+    <p:sldId id="262" r:id="rId10"/>
+    <p:sldId id="263" r:id="rId11"/>
+    <p:sldId id="264" r:id="rId12"/>
+    <p:sldId id="265" r:id="rId13"/>
+    <p:sldId id="266" r:id="rId14"/>
+    <p:sldId id="267" r:id="rId15"/>
+    <p:sldId id="268" r:id="rId16"/>
+    <p:sldId id="269" r:id="rId17"/>
+    <p:sldId id="270" r:id="rId18"/>
+    <p:sldId id="271" r:id="rId19"/>
+    <p:sldId id="272" r:id="rId20"/>
+    <p:sldId id="273" r:id="rId21"/>
+    <p:sldId id="274" r:id="rId22"/>
+    <p:sldId id="275" r:id="rId23"/>
+    <p:sldId id="276" r:id="rId24"/>
+    <p:sldId id="277" r:id="rId25"/>
+    <p:sldId id="278" r:id="rId26"/>
+    <p:sldId id="279" r:id="rId27"/>
+    <p:sldId id="280" r:id="rId28"/>
+    <p:sldId id="281" r:id="rId29"/>
+    <p:sldId id="282" r:id="rId30"/>
   </p:sldIdLst>
   <p:sldSz cx="9144000" cy="5143500" type="screen16x9"/>
   <p:notesSz cx="5143500" cy="9144000"/>
@@ -6040,6 +6041,90 @@
   <p:cSld>
     <p:spTree>
       <p:nvGrpSpPr>
+        <p:cNvPr id="1" name=""/>
+        <p:cNvGrpSpPr/>
+        <p:nvPr/>
+      </p:nvGrpSpPr>
+      <p:grpSpPr>
+        <a:xfrm>
+          <a:off x="0" y="0"/>
+          <a:ext cx="0" cy="0"/>
+          <a:chOff x="0" y="0"/>
+          <a:chExt cx="0" cy="0"/>
+        </a:xfrm>
+      </p:grpSpPr>
+      <p:sp>
+        <p:nvSpPr>
+          <p:cNvPr id="2" name="Slide Image Placeholder 1"/>
+          <p:cNvSpPr>
+            <a:spLocks noGrp="1" noRot="1" noChangeAspect="1"/>
+          </p:cNvSpPr>
+          <p:nvPr>
+            <p:ph type="sldImg"/>
+          </p:nvPr>
+        </p:nvSpPr>
+        <p:spPr/>
+      </p:sp>
+      <p:sp>
+        <p:nvSpPr>
+          <p:cNvPr id="3" name="Notes Placeholder 2"/>
+          <p:cNvSpPr>
+            <a:spLocks noGrp="1"/>
+          </p:cNvSpPr>
+          <p:nvPr>
+            <p:ph type="body" idx="1"/>
+          </p:nvPr>
+        </p:nvSpPr>
+        <p:spPr/>
+        <p:txBody>
+          <a:bodyPr/>
+          <a:lstStyle/>
+          <a:p>
+            <a:endParaRPr lang="en-US" dirty="0"/>
+          </a:p>
+        </p:txBody>
+      </p:sp>
+      <p:sp>
+        <p:nvSpPr>
+          <p:cNvPr id="4" name="Slide Number Placeholder 3"/>
+          <p:cNvSpPr>
+            <a:spLocks noGrp="1"/>
+          </p:cNvSpPr>
+          <p:nvPr>
+            <p:ph type="sldNum" sz="quarter" idx="10"/>
+          </p:nvPr>
+        </p:nvSpPr>
+        <p:spPr/>
+        <p:txBody>
+          <a:bodyPr/>
+          <a:lstStyle/>
+          <a:p>
+            <a:fld id="{F7021451-1387-4CA6-816F-3879F97B5CBC}" type="slidenum">
+              <a:rPr lang="en-US"/>
+              <a:t>28</a:t>
+            </a:fld>
+            <a:endParaRPr lang="en-US"/>
+          </a:p>
+        </p:txBody>
+      </p:sp>
+    </p:spTree>
+    <p:extLst>
+      <p:ext uri="{BB962C8B-B14F-4D97-AF65-F5344CB8AC3E}">
+        <p14:creationId xmlns:p14="http://schemas.microsoft.com/office/powerpoint/2010/main" val="1024086991"/>
+      </p:ext>
+    </p:extLst>
+  </p:cSld>
+  <p:clrMapOvr>
+    <a:masterClrMapping/>
+  </p:clrMapOvr>
+</p:notes>
+</file>
+
+<file path=ppt/notesSlides/notesSlide29.xml><?xml version="1.0" encoding="utf-8"?>
+<p:notes xmlns:a="http://schemas.openxmlformats.org/drawingml/2006/main" xmlns:r="http://schemas.openxmlformats.org/officeDocument/2006/relationships" xmlns:p="http://schemas.openxmlformats.org/presentationml/2006/main">
+  <p:cSld>
+    <p:spTree>
+      <p:nvGrpSpPr>
         <p:cNvPr id="1" name="">
           <a:extLst>
             <a:ext uri="{FF2B5EF4-FFF2-40B4-BE49-F238E27FC236}">
@@ -6124,7 +6209,7 @@
           <a:p>
             <a:fld id="{F7021451-1387-4CA6-816F-3879F97B5CBC}" type="slidenum">
               <a:rPr lang="en-US"/>
-              <a:t>28</a:t>
+              <a:t>29</a:t>
             </a:fld>
             <a:endParaRPr lang="en-US"/>
           </a:p>
@@ -6484,7 +6569,13 @@
   <p:cSld>
     <p:spTree>
       <p:nvGrpSpPr>
-        <p:cNvPr id="1" name=""/>
+        <p:cNvPr id="1" name="">
+          <a:extLst>
+            <a:ext uri="{FF2B5EF4-FFF2-40B4-BE49-F238E27FC236}">
+              <a16:creationId xmlns:a16="http://schemas.microsoft.com/office/drawing/2014/main" id="{2427E958-611A-8291-6653-2DFE48A1920C}"/>
+            </a:ext>
+          </a:extLst>
+        </p:cNvPr>
         <p:cNvGrpSpPr/>
         <p:nvPr/>
       </p:nvGrpSpPr>
@@ -6498,7 +6589,13 @@
       </p:grpSpPr>
       <p:sp>
         <p:nvSpPr>
-          <p:cNvPr id="2" name="Slide Image Placeholder 1"/>
+          <p:cNvPr id="2" name="Slide Image Placeholder 1">
+            <a:extLst>
+              <a:ext uri="{FF2B5EF4-FFF2-40B4-BE49-F238E27FC236}">
+                <a16:creationId xmlns:a16="http://schemas.microsoft.com/office/drawing/2014/main" id="{45956C00-ECE2-1F5F-3789-41FDD5CDAB2A}"/>
+              </a:ext>
+            </a:extLst>
+          </p:cNvPr>
           <p:cNvSpPr>
             <a:spLocks noGrp="1" noRot="1" noChangeAspect="1"/>
           </p:cNvSpPr>
@@ -6510,7 +6607,13 @@
       </p:sp>
       <p:sp>
         <p:nvSpPr>
-          <p:cNvPr id="3" name="Notes Placeholder 2"/>
+          <p:cNvPr id="3" name="Notes Placeholder 2">
+            <a:extLst>
+              <a:ext uri="{FF2B5EF4-FFF2-40B4-BE49-F238E27FC236}">
+                <a16:creationId xmlns:a16="http://schemas.microsoft.com/office/drawing/2014/main" id="{9FBE82B4-34C2-430B-4882-16C24A0A9501}"/>
+              </a:ext>
+            </a:extLst>
+          </p:cNvPr>
           <p:cNvSpPr>
             <a:spLocks noGrp="1"/>
           </p:cNvSpPr>
@@ -6529,7 +6632,13 @@
       </p:sp>
       <p:sp>
         <p:nvSpPr>
-          <p:cNvPr id="4" name="Slide Number Placeholder 3"/>
+          <p:cNvPr id="4" name="Slide Number Placeholder 3">
+            <a:extLst>
+              <a:ext uri="{FF2B5EF4-FFF2-40B4-BE49-F238E27FC236}">
+                <a16:creationId xmlns:a16="http://schemas.microsoft.com/office/drawing/2014/main" id="{A5947199-26B6-8824-6469-3BDA612568CA}"/>
+              </a:ext>
+            </a:extLst>
+          </p:cNvPr>
           <p:cNvSpPr>
             <a:spLocks noGrp="1"/>
           </p:cNvSpPr>
@@ -6553,7 +6662,7 @@
     </p:spTree>
     <p:extLst>
       <p:ext uri="{BB962C8B-B14F-4D97-AF65-F5344CB8AC3E}">
-        <p14:creationId xmlns:p14="http://schemas.microsoft.com/office/powerpoint/2010/main" val="1024086991"/>
+        <p14:creationId xmlns:p14="http://schemas.microsoft.com/office/powerpoint/2010/main" val="1025011031"/>
       </p:ext>
     </p:extLst>
   </p:cSld>
@@ -7076,21 +7185,37 @@
         </p:nvSpPr>
         <p:spPr>
           <a:xfrm>
-            <a:off x="6583680" y="-822960"/>
+            <a:off x="6675120" y="-662940"/>
             <a:ext cx="3840480" cy="3840480"/>
           </a:xfrm>
           <a:prstGeom prst="ellipse">
             <a:avLst/>
           </a:prstGeom>
           <a:solidFill>
-            <a:srgbClr val="F57C00"/>
+            <a:srgbClr val="FF6600"/>
           </a:solidFill>
           <a:ln w="12700">
-            <a:solidFill>
-              <a:srgbClr val="F57C00"/>
-            </a:solidFill>
+            <a:noFill/>
             <a:prstDash val="solid"/>
           </a:ln>
+          <a:effectLst>
+            <a:outerShdw blurRad="44450" dist="27940" dir="5400000" algn="ctr">
+              <a:srgbClr val="000000">
+                <a:alpha val="32000"/>
+              </a:srgbClr>
+            </a:outerShdw>
+          </a:effectLst>
+          <a:scene3d>
+            <a:camera prst="orthographicFront">
+              <a:rot lat="0" lon="0" rev="0"/>
+            </a:camera>
+            <a:lightRig rig="balanced" dir="t">
+              <a:rot lat="0" lon="0" rev="8700000"/>
+            </a:lightRig>
+          </a:scene3d>
+          <a:sp3d>
+            <a:bevelT w="190500" h="38100"/>
+          </a:sp3d>
         </p:spPr>
       </p:sp>
       <p:sp>
@@ -7101,7 +7226,7 @@
         </p:nvSpPr>
         <p:spPr>
           <a:xfrm>
-            <a:off x="7518399" y="2926080"/>
+            <a:off x="6748549" y="2880360"/>
             <a:ext cx="3108960" cy="3108960"/>
           </a:xfrm>
           <a:prstGeom prst="ellipse">
@@ -7111,11 +7236,27 @@
             <a:srgbClr val="1565C0"/>
           </a:solidFill>
           <a:ln w="12700">
-            <a:solidFill>
-              <a:srgbClr val="1565C0"/>
-            </a:solidFill>
+            <a:noFill/>
             <a:prstDash val="solid"/>
           </a:ln>
+          <a:effectLst>
+            <a:outerShdw blurRad="44450" dist="27940" dir="5400000" algn="ctr">
+              <a:srgbClr val="000000">
+                <a:alpha val="32000"/>
+              </a:srgbClr>
+            </a:outerShdw>
+          </a:effectLst>
+          <a:scene3d>
+            <a:camera prst="orthographicFront">
+              <a:rot lat="0" lon="0" rev="0"/>
+            </a:camera>
+            <a:lightRig rig="balanced" dir="t">
+              <a:rot lat="0" lon="0" rev="8700000"/>
+            </a:lightRig>
+          </a:scene3d>
+          <a:sp3d>
+            <a:bevelT w="190500" h="38100"/>
+          </a:sp3d>
         </p:spPr>
       </p:sp>
       <p:sp>
@@ -7328,6 +7469,462 @@
 </file>
 
 <file path=ppt/slides/slide10.xml><?xml version="1.0" encoding="utf-8"?>
+<p:sld xmlns:a="http://schemas.openxmlformats.org/drawingml/2006/main" xmlns:r="http://schemas.openxmlformats.org/officeDocument/2006/relationships" xmlns:p="http://schemas.openxmlformats.org/presentationml/2006/main">
+  <p:cSld name="Slide 8">
+    <p:bg>
+      <p:bgPr>
+        <a:solidFill>
+          <a:srgbClr val="FFFFFF"/>
+        </a:solidFill>
+        <a:effectLst/>
+      </p:bgPr>
+    </p:bg>
+    <p:spTree>
+      <p:nvGrpSpPr>
+        <p:cNvPr id="1" name=""/>
+        <p:cNvGrpSpPr/>
+        <p:nvPr/>
+      </p:nvGrpSpPr>
+      <p:grpSpPr>
+        <a:xfrm>
+          <a:off x="0" y="0"/>
+          <a:ext cx="0" cy="0"/>
+          <a:chOff x="0" y="0"/>
+          <a:chExt cx="0" cy="0"/>
+        </a:xfrm>
+      </p:grpSpPr>
+      <p:sp>
+        <p:nvSpPr>
+          <p:cNvPr id="2" name="Text 0"/>
+          <p:cNvSpPr txBox="1"/>
+          <p:nvPr/>
+        </p:nvSpPr>
+        <p:spPr>
+          <a:xfrm>
+            <a:off x="457200" y="274320"/>
+            <a:ext cx="6766560" cy="548640"/>
+          </a:xfrm>
+          <a:prstGeom prst="rect">
+            <a:avLst/>
+          </a:prstGeom>
+          <a:noFill/>
+          <a:ln/>
+        </p:spPr>
+        <p:txBody>
+          <a:bodyPr wrap="square" lIns="0" tIns="0" rIns="0" bIns="0" rtlCol="0" anchor="ctr"/>
+          <a:lstStyle/>
+          <a:p>
+            <a:pPr marL="0" indent="0">
+              <a:buNone/>
+            </a:pPr>
+            <a:r>
+              <a:rPr lang="en-US" sz="2800" b="1" dirty="0">
+                <a:solidFill>
+                  <a:srgbClr val="111111"/>
+                </a:solidFill>
+                <a:latin typeface="Calibri" pitchFamily="34" charset="0"/>
+                <a:ea typeface="Calibri" pitchFamily="34" charset="-122"/>
+                <a:cs typeface="Calibri" pitchFamily="34" charset="-120"/>
+              </a:rPr>
+              <a:t>Logistic regression baseline</a:t>
+            </a:r>
+            <a:endParaRPr lang="en-US" sz="2800" dirty="0"/>
+          </a:p>
+        </p:txBody>
+      </p:sp>
+      <p:sp>
+        <p:nvSpPr>
+          <p:cNvPr id="3" name="Shape 1"/>
+          <p:cNvSpPr/>
+          <p:nvPr/>
+        </p:nvSpPr>
+        <p:spPr>
+          <a:xfrm>
+            <a:off x="7315200" y="347472"/>
+            <a:ext cx="1371600" cy="329184"/>
+          </a:xfrm>
+          <a:prstGeom prst="roundRect">
+            <a:avLst>
+              <a:gd name="adj" fmla="val 27778"/>
+            </a:avLst>
+          </a:prstGeom>
+          <a:solidFill>
+            <a:srgbClr val="F57C00"/>
+          </a:solidFill>
+          <a:ln w="12700">
+            <a:solidFill>
+              <a:srgbClr val="F57C00"/>
+            </a:solidFill>
+            <a:prstDash val="solid"/>
+          </a:ln>
+        </p:spPr>
+      </p:sp>
+      <p:sp>
+        <p:nvSpPr>
+          <p:cNvPr id="4" name="Text 2"/>
+          <p:cNvSpPr txBox="1"/>
+          <p:nvPr/>
+        </p:nvSpPr>
+        <p:spPr>
+          <a:xfrm>
+            <a:off x="7315200" y="347472"/>
+            <a:ext cx="1371600" cy="329184"/>
+          </a:xfrm>
+          <a:prstGeom prst="rect">
+            <a:avLst/>
+          </a:prstGeom>
+          <a:noFill/>
+          <a:ln/>
+        </p:spPr>
+        <p:txBody>
+          <a:bodyPr wrap="square" lIns="0" tIns="0" rIns="0" bIns="0" rtlCol="0" anchor="ctr"/>
+          <a:lstStyle/>
+          <a:p>
+            <a:pPr marL="0" indent="0" algn="ctr">
+              <a:buNone/>
+            </a:pPr>
+            <a:r>
+              <a:rPr lang="en-US" sz="1200" b="1" dirty="0">
+                <a:solidFill>
+                  <a:srgbClr val="FFFFFF"/>
+                </a:solidFill>
+                <a:latin typeface="Calibri" pitchFamily="34" charset="0"/>
+                <a:ea typeface="Calibri" pitchFamily="34" charset="-122"/>
+                <a:cs typeface="Calibri" pitchFamily="34" charset="-120"/>
+              </a:rPr>
+              <a:t>PART 1</a:t>
+            </a:r>
+            <a:endParaRPr lang="en-US" sz="1200" dirty="0"/>
+          </a:p>
+        </p:txBody>
+      </p:sp>
+      <p:sp>
+        <p:nvSpPr>
+          <p:cNvPr id="5" name="Shape 3"/>
+          <p:cNvSpPr/>
+          <p:nvPr/>
+        </p:nvSpPr>
+        <p:spPr>
+          <a:xfrm>
+            <a:off x="457200" y="1005840"/>
+            <a:ext cx="1920240" cy="1005840"/>
+          </a:xfrm>
+          <a:prstGeom prst="roundRect">
+            <a:avLst>
+              <a:gd name="adj" fmla="val 7273"/>
+            </a:avLst>
+          </a:prstGeom>
+          <a:solidFill>
+            <a:srgbClr val="F2F4F7"/>
+          </a:solidFill>
+          <a:ln w="12700">
+            <a:solidFill>
+              <a:srgbClr val="F2F4F7"/>
+            </a:solidFill>
+            <a:prstDash val="solid"/>
+          </a:ln>
+          <a:effectLst>
+            <a:outerShdw blurRad="76200" dist="25400" dir="5400000" algn="bl" rotWithShape="0">
+              <a:srgbClr val="000000">
+                <a:alpha val="12000"/>
+              </a:srgbClr>
+            </a:outerShdw>
+          </a:effectLst>
+        </p:spPr>
+      </p:sp>
+      <p:sp>
+        <p:nvSpPr>
+          <p:cNvPr id="6" name="Text 4"/>
+          <p:cNvSpPr txBox="1"/>
+          <p:nvPr/>
+        </p:nvSpPr>
+        <p:spPr>
+          <a:xfrm>
+            <a:off x="594360" y="1097280"/>
+            <a:ext cx="1645920" cy="452628"/>
+          </a:xfrm>
+          <a:prstGeom prst="rect">
+            <a:avLst/>
+          </a:prstGeom>
+          <a:noFill/>
+          <a:ln/>
+        </p:spPr>
+        <p:txBody>
+          <a:bodyPr wrap="square" lIns="0" tIns="0" rIns="0" bIns="0" rtlCol="0" anchor="ctr"/>
+          <a:lstStyle/>
+          <a:p>
+            <a:pPr marL="0" indent="0">
+              <a:buNone/>
+            </a:pPr>
+            <a:r>
+              <a:rPr lang="en-US" sz="3000" b="1" dirty="0">
+                <a:solidFill>
+                  <a:srgbClr val="1565C0"/>
+                </a:solidFill>
+                <a:latin typeface="Calibri" pitchFamily="34" charset="0"/>
+                <a:ea typeface="Calibri" pitchFamily="34" charset="-122"/>
+                <a:cs typeface="Calibri" pitchFamily="34" charset="-120"/>
+              </a:rPr>
+              <a:t>79.1%</a:t>
+            </a:r>
+            <a:endParaRPr lang="en-US" sz="3000" dirty="0"/>
+          </a:p>
+        </p:txBody>
+      </p:sp>
+      <p:sp>
+        <p:nvSpPr>
+          <p:cNvPr id="7" name="Text 5"/>
+          <p:cNvSpPr txBox="1"/>
+          <p:nvPr/>
+        </p:nvSpPr>
+        <p:spPr>
+          <a:xfrm>
+            <a:off x="594360" y="1559052"/>
+            <a:ext cx="1645920" cy="402336"/>
+          </a:xfrm>
+          <a:prstGeom prst="rect">
+            <a:avLst/>
+          </a:prstGeom>
+          <a:noFill/>
+          <a:ln/>
+        </p:spPr>
+        <p:txBody>
+          <a:bodyPr wrap="square" lIns="0" tIns="0" rIns="0" bIns="0" rtlCol="0" anchor="t"/>
+          <a:lstStyle/>
+          <a:p>
+            <a:pPr marL="0" indent="0">
+              <a:buNone/>
+            </a:pPr>
+            <a:r>
+              <a:rPr lang="en-US" sz="1300" dirty="0">
+                <a:solidFill>
+                  <a:srgbClr val="111111"/>
+                </a:solidFill>
+                <a:latin typeface="Calibri" pitchFamily="34" charset="0"/>
+                <a:ea typeface="Calibri" pitchFamily="34" charset="-122"/>
+                <a:cs typeface="Calibri" pitchFamily="34" charset="-120"/>
+              </a:rPr>
+              <a:t>accuracy at 0.5 cut-off</a:t>
+            </a:r>
+            <a:endParaRPr lang="en-US" sz="1300" dirty="0"/>
+          </a:p>
+        </p:txBody>
+      </p:sp>
+      <p:sp>
+        <p:nvSpPr>
+          <p:cNvPr id="8" name="Shape 6"/>
+          <p:cNvSpPr/>
+          <p:nvPr/>
+        </p:nvSpPr>
+        <p:spPr>
+          <a:xfrm>
+            <a:off x="2514600" y="1005840"/>
+            <a:ext cx="1920240" cy="1005840"/>
+          </a:xfrm>
+          <a:prstGeom prst="roundRect">
+            <a:avLst>
+              <a:gd name="adj" fmla="val 7273"/>
+            </a:avLst>
+          </a:prstGeom>
+          <a:solidFill>
+            <a:srgbClr val="F2F4F7"/>
+          </a:solidFill>
+          <a:ln w="12700">
+            <a:solidFill>
+              <a:srgbClr val="F2F4F7"/>
+            </a:solidFill>
+            <a:prstDash val="solid"/>
+          </a:ln>
+          <a:effectLst>
+            <a:outerShdw blurRad="76200" dist="25400" dir="5400000" algn="bl" rotWithShape="0">
+              <a:srgbClr val="000000">
+                <a:alpha val="12000"/>
+              </a:srgbClr>
+            </a:outerShdw>
+          </a:effectLst>
+        </p:spPr>
+      </p:sp>
+      <p:sp>
+        <p:nvSpPr>
+          <p:cNvPr id="9" name="Text 7"/>
+          <p:cNvSpPr txBox="1"/>
+          <p:nvPr/>
+        </p:nvSpPr>
+        <p:spPr>
+          <a:xfrm>
+            <a:off x="2651760" y="1097280"/>
+            <a:ext cx="1645920" cy="452628"/>
+          </a:xfrm>
+          <a:prstGeom prst="rect">
+            <a:avLst/>
+          </a:prstGeom>
+          <a:noFill/>
+          <a:ln/>
+        </p:spPr>
+        <p:txBody>
+          <a:bodyPr wrap="square" lIns="0" tIns="0" rIns="0" bIns="0" rtlCol="0" anchor="ctr"/>
+          <a:lstStyle/>
+          <a:p>
+            <a:pPr marL="0" indent="0">
+              <a:buNone/>
+            </a:pPr>
+            <a:r>
+              <a:rPr lang="en-US" sz="3000" b="1" dirty="0">
+                <a:solidFill>
+                  <a:srgbClr val="F57C00"/>
+                </a:solidFill>
+                <a:latin typeface="Calibri" pitchFamily="34" charset="0"/>
+                <a:ea typeface="Calibri" pitchFamily="34" charset="-122"/>
+                <a:cs typeface="Calibri" pitchFamily="34" charset="-120"/>
+              </a:rPr>
+              <a:t>17.7%</a:t>
+            </a:r>
+            <a:endParaRPr lang="en-US" sz="3000" dirty="0"/>
+          </a:p>
+        </p:txBody>
+      </p:sp>
+      <p:sp>
+        <p:nvSpPr>
+          <p:cNvPr id="10" name="Text 8"/>
+          <p:cNvSpPr txBox="1"/>
+          <p:nvPr/>
+        </p:nvSpPr>
+        <p:spPr>
+          <a:xfrm>
+            <a:off x="2651760" y="1559052"/>
+            <a:ext cx="1645920" cy="402336"/>
+          </a:xfrm>
+          <a:prstGeom prst="rect">
+            <a:avLst/>
+          </a:prstGeom>
+          <a:noFill/>
+          <a:ln/>
+        </p:spPr>
+        <p:txBody>
+          <a:bodyPr wrap="square" lIns="0" tIns="0" rIns="0" bIns="0" rtlCol="0" anchor="t"/>
+          <a:lstStyle/>
+          <a:p>
+            <a:pPr marL="0" indent="0">
+              <a:buNone/>
+            </a:pPr>
+            <a:r>
+              <a:rPr lang="en-US" sz="1300" dirty="0">
+                <a:solidFill>
+                  <a:srgbClr val="111111"/>
+                </a:solidFill>
+                <a:latin typeface="Calibri" pitchFamily="34" charset="0"/>
+                <a:ea typeface="Calibri" pitchFamily="34" charset="-122"/>
+                <a:cs typeface="Calibri" pitchFamily="34" charset="-120"/>
+              </a:rPr>
+              <a:t>good applicants wrongly declined (225 of 1,271)</a:t>
+            </a:r>
+            <a:endParaRPr lang="en-US" sz="1300" dirty="0"/>
+          </a:p>
+        </p:txBody>
+      </p:sp>
+      <p:sp>
+        <p:nvSpPr>
+          <p:cNvPr id="11" name="Text 9"/>
+          <p:cNvSpPr txBox="1"/>
+          <p:nvPr/>
+        </p:nvSpPr>
+        <p:spPr>
+          <a:xfrm>
+            <a:off x="457200" y="2286000"/>
+            <a:ext cx="3977640" cy="1097280"/>
+          </a:xfrm>
+          <a:prstGeom prst="rect">
+            <a:avLst/>
+          </a:prstGeom>
+          <a:noFill/>
+          <a:ln/>
+        </p:spPr>
+        <p:txBody>
+          <a:bodyPr wrap="square" lIns="0" tIns="0" rIns="0" bIns="0" rtlCol="0" anchor="t"/>
+          <a:lstStyle/>
+          <a:p>
+            <a:pPr marL="0" indent="0">
+              <a:buNone/>
+            </a:pPr>
+            <a:r>
+              <a:rPr lang="en-US" sz="1400" dirty="0">
+                <a:solidFill>
+                  <a:srgbClr val="111111"/>
+                </a:solidFill>
+                <a:latin typeface="Calibri" pitchFamily="34" charset="0"/>
+                <a:ea typeface="Calibri" pitchFamily="34" charset="-122"/>
+                <a:cs typeface="Calibri" pitchFamily="34" charset="-120"/>
+              </a:rPr>
+              <a:t>Why 0.5 is not usable: nearly 1 in 5 creditworthy customers would be turned away. Declined precision 79.1%, recall 75.5%.</a:t>
+            </a:r>
+            <a:endParaRPr lang="en-US" sz="1400" dirty="0"/>
+          </a:p>
+        </p:txBody>
+      </p:sp>
+      <p:sp>
+        <p:nvSpPr>
+          <p:cNvPr id="12" name="Text 10"/>
+          <p:cNvSpPr txBox="1"/>
+          <p:nvPr/>
+        </p:nvSpPr>
+        <p:spPr>
+          <a:xfrm>
+            <a:off x="457200" y="3474720"/>
+            <a:ext cx="3977640" cy="1097280"/>
+          </a:xfrm>
+          <a:prstGeom prst="rect">
+            <a:avLst/>
+          </a:prstGeom>
+          <a:noFill/>
+          <a:ln/>
+        </p:spPr>
+        <p:txBody>
+          <a:bodyPr wrap="square" lIns="0" tIns="0" rIns="0" bIns="0" rtlCol="0" anchor="t"/>
+          <a:lstStyle/>
+          <a:p>
+            <a:pPr marL="0" indent="0">
+              <a:buNone/>
+            </a:pPr>
+            <a:r>
+              <a:rPr lang="en-US" sz="1400" dirty="0">
+                <a:solidFill>
+                  <a:srgbClr val="5F6B7A"/>
+                </a:solidFill>
+                <a:latin typeface="Calibri" pitchFamily="34" charset="0"/>
+                <a:ea typeface="Calibri" pitchFamily="34" charset="-122"/>
+                <a:cs typeface="Calibri" pitchFamily="34" charset="-120"/>
+              </a:rPr>
+              <a:t>Reads like the credit team: affordability, bureau score and repayment history lead; city tier and age barely matter.</a:t>
+            </a:r>
+            <a:endParaRPr lang="en-US" sz="1400" dirty="0"/>
+          </a:p>
+        </p:txBody>
+      </p:sp>
+      <p:graphicFrame>
+        <p:nvGraphicFramePr>
+          <p:cNvPr id="13" name="Chart 0"/>
+          <p:cNvGraphicFramePr/>
+          <p:nvPr/>
+        </p:nvGraphicFramePr>
+        <p:xfrm>
+          <a:off x="4663440" y="914400"/>
+          <a:ext cx="4114800" cy="3840480"/>
+        </p:xfrm>
+        <a:graphic>
+          <a:graphicData uri="http://schemas.openxmlformats.org/drawingml/2006/chart">
+            <c:chart xmlns:c="http://schemas.openxmlformats.org/drawingml/2006/chart" xmlns:r="http://schemas.openxmlformats.org/officeDocument/2006/relationships" r:id="rId3"/>
+          </a:graphicData>
+        </a:graphic>
+      </p:graphicFrame>
+    </p:spTree>
+  </p:cSld>
+  <p:clrMapOvr>
+    <a:masterClrMapping/>
+  </p:clrMapOvr>
+</p:sld>
+</file>
+
+<file path=ppt/slides/slide11.xml><?xml version="1.0" encoding="utf-8"?>
 <p:sld xmlns:a="http://schemas.openxmlformats.org/drawingml/2006/main" xmlns:r="http://schemas.openxmlformats.org/officeDocument/2006/relationships" xmlns:p="http://schemas.openxmlformats.org/presentationml/2006/main">
   <p:cSld name="Slide 9">
     <p:bg>
@@ -8484,7 +9081,7 @@
 </p:sld>
 </file>
 
-<file path=ppt/slides/slide11.xml><?xml version="1.0" encoding="utf-8"?>
+<file path=ppt/slides/slide12.xml><?xml version="1.0" encoding="utf-8"?>
 <p:sld xmlns:a="http://schemas.openxmlformats.org/drawingml/2006/main" xmlns:r="http://schemas.openxmlformats.org/officeDocument/2006/relationships" xmlns:p="http://schemas.openxmlformats.org/presentationml/2006/main">
   <p:cSld name="Slide 10">
     <p:bg>
@@ -9976,7 +10573,7 @@
 </p:sld>
 </file>
 
-<file path=ppt/slides/slide12.xml><?xml version="1.0" encoding="utf-8"?>
+<file path=ppt/slides/slide13.xml><?xml version="1.0" encoding="utf-8"?>
 <p:sld xmlns:a="http://schemas.openxmlformats.org/drawingml/2006/main" xmlns:r="http://schemas.openxmlformats.org/officeDocument/2006/relationships" xmlns:p="http://schemas.openxmlformats.org/presentationml/2006/main">
   <p:cSld name="Slide 11">
     <p:bg>
@@ -10505,7 +11102,7 @@
 </p:sld>
 </file>
 
-<file path=ppt/slides/slide13.xml><?xml version="1.0" encoding="utf-8"?>
+<file path=ppt/slides/slide14.xml><?xml version="1.0" encoding="utf-8"?>
 <p:sld xmlns:a="http://schemas.openxmlformats.org/drawingml/2006/main" xmlns:r="http://schemas.openxmlformats.org/officeDocument/2006/relationships" xmlns:p="http://schemas.openxmlformats.org/presentationml/2006/main">
   <p:cSld name="Slide 12">
     <p:bg>
@@ -13521,7 +14118,7 @@
 </p:sld>
 </file>
 
-<file path=ppt/slides/slide14.xml><?xml version="1.0" encoding="utf-8"?>
+<file path=ppt/slides/slide15.xml><?xml version="1.0" encoding="utf-8"?>
 <p:sld xmlns:a="http://schemas.openxmlformats.org/drawingml/2006/main" xmlns:r="http://schemas.openxmlformats.org/officeDocument/2006/relationships" xmlns:p="http://schemas.openxmlformats.org/presentationml/2006/main">
   <p:cSld name="Slide 13">
     <p:bg>
@@ -14965,7 +15562,7 @@
 </p:sld>
 </file>
 
-<file path=ppt/slides/slide15.xml><?xml version="1.0" encoding="utf-8"?>
+<file path=ppt/slides/slide16.xml><?xml version="1.0" encoding="utf-8"?>
 <p:sld xmlns:a="http://schemas.openxmlformats.org/drawingml/2006/main" xmlns:r="http://schemas.openxmlformats.org/officeDocument/2006/relationships" xmlns:p="http://schemas.openxmlformats.org/presentationml/2006/main">
   <p:cSld name="Slide 14">
     <p:bg>
@@ -15179,7 +15776,7 @@
 </p:sld>
 </file>
 
-<file path=ppt/slides/slide16.xml><?xml version="1.0" encoding="utf-8"?>
+<file path=ppt/slides/slide17.xml><?xml version="1.0" encoding="utf-8"?>
 <p:sld xmlns:a="http://schemas.openxmlformats.org/drawingml/2006/main" xmlns:r="http://schemas.openxmlformats.org/officeDocument/2006/relationships" xmlns:p="http://schemas.openxmlformats.org/presentationml/2006/main">
   <p:cSld name="Slide 15">
     <p:bg>
@@ -18190,7 +18787,7 @@
 </p:sld>
 </file>
 
-<file path=ppt/slides/slide17.xml><?xml version="1.0" encoding="utf-8"?>
+<file path=ppt/slides/slide18.xml><?xml version="1.0" encoding="utf-8"?>
 <p:sld xmlns:a="http://schemas.openxmlformats.org/drawingml/2006/main" xmlns:r="http://schemas.openxmlformats.org/officeDocument/2006/relationships" xmlns:p="http://schemas.openxmlformats.org/presentationml/2006/main">
   <p:cSld name="Slide 16">
     <p:bg>
@@ -20165,7 +20762,7 @@
 </p:sld>
 </file>
 
-<file path=ppt/slides/slide18.xml><?xml version="1.0" encoding="utf-8"?>
+<file path=ppt/slides/slide19.xml><?xml version="1.0" encoding="utf-8"?>
 <p:sld xmlns:a="http://schemas.openxmlformats.org/drawingml/2006/main" xmlns:r="http://schemas.openxmlformats.org/officeDocument/2006/relationships" xmlns:p="http://schemas.openxmlformats.org/presentationml/2006/main">
   <p:cSld name="Slide 17">
     <p:bg>
@@ -20544,336 +21141,6 @@
               <a:t>Test set used once, after cross-validation.</a:t>
             </a:r>
             <a:endParaRPr lang="en-US" sz="1200" dirty="0"/>
-          </a:p>
-        </p:txBody>
-      </p:sp>
-    </p:spTree>
-  </p:cSld>
-  <p:clrMapOvr>
-    <a:masterClrMapping/>
-  </p:clrMapOvr>
-</p:sld>
-</file>
-
-<file path=ppt/slides/slide19.xml><?xml version="1.0" encoding="utf-8"?>
-<p:sld xmlns:a="http://schemas.openxmlformats.org/drawingml/2006/main" xmlns:r="http://schemas.openxmlformats.org/officeDocument/2006/relationships" xmlns:p="http://schemas.openxmlformats.org/presentationml/2006/main">
-  <p:cSld name="Slide 18">
-    <p:bg>
-      <p:bgPr>
-        <a:solidFill>
-          <a:srgbClr val="FFFFFF"/>
-        </a:solidFill>
-        <a:effectLst/>
-      </p:bgPr>
-    </p:bg>
-    <p:spTree>
-      <p:nvGrpSpPr>
-        <p:cNvPr id="1" name=""/>
-        <p:cNvGrpSpPr/>
-        <p:nvPr/>
-      </p:nvGrpSpPr>
-      <p:grpSpPr>
-        <a:xfrm>
-          <a:off x="0" y="0"/>
-          <a:ext cx="0" cy="0"/>
-          <a:chOff x="0" y="0"/>
-          <a:chExt cx="0" cy="0"/>
-        </a:xfrm>
-      </p:grpSpPr>
-      <p:sp>
-        <p:nvSpPr>
-          <p:cNvPr id="2" name="Text 0"/>
-          <p:cNvSpPr txBox="1"/>
-          <p:nvPr/>
-        </p:nvSpPr>
-        <p:spPr>
-          <a:xfrm>
-            <a:off x="457200" y="274320"/>
-            <a:ext cx="6766560" cy="548640"/>
-          </a:xfrm>
-          <a:prstGeom prst="rect">
-            <a:avLst/>
-          </a:prstGeom>
-          <a:noFill/>
-          <a:ln/>
-        </p:spPr>
-        <p:txBody>
-          <a:bodyPr wrap="square" lIns="0" tIns="0" rIns="0" bIns="0" rtlCol="0" anchor="ctr"/>
-          <a:lstStyle/>
-          <a:p>
-            <a:pPr marL="0" indent="0">
-              <a:buNone/>
-            </a:pPr>
-            <a:r>
-              <a:rPr lang="en-US" sz="2800" b="1" dirty="0">
-                <a:solidFill>
-                  <a:srgbClr val="111111"/>
-                </a:solidFill>
-                <a:latin typeface="Calibri" pitchFamily="34" charset="0"/>
-                <a:ea typeface="Calibri" pitchFamily="34" charset="-122"/>
-                <a:cs typeface="Calibri" pitchFamily="34" charset="-120"/>
-              </a:rPr>
-              <a:t>Feature importances (top 8)</a:t>
-            </a:r>
-            <a:endParaRPr lang="en-US" sz="2800" dirty="0"/>
-          </a:p>
-        </p:txBody>
-      </p:sp>
-      <p:sp>
-        <p:nvSpPr>
-          <p:cNvPr id="3" name="Shape 1"/>
-          <p:cNvSpPr/>
-          <p:nvPr/>
-        </p:nvSpPr>
-        <p:spPr>
-          <a:xfrm>
-            <a:off x="7315200" y="347472"/>
-            <a:ext cx="1371600" cy="329184"/>
-          </a:xfrm>
-          <a:prstGeom prst="roundRect">
-            <a:avLst>
-              <a:gd name="adj" fmla="val 27778"/>
-            </a:avLst>
-          </a:prstGeom>
-          <a:solidFill>
-            <a:srgbClr val="1565C0"/>
-          </a:solidFill>
-          <a:ln w="12700">
-            <a:solidFill>
-              <a:srgbClr val="1565C0"/>
-            </a:solidFill>
-            <a:prstDash val="solid"/>
-          </a:ln>
-        </p:spPr>
-      </p:sp>
-      <p:sp>
-        <p:nvSpPr>
-          <p:cNvPr id="4" name="Text 2"/>
-          <p:cNvSpPr txBox="1"/>
-          <p:nvPr/>
-        </p:nvSpPr>
-        <p:spPr>
-          <a:xfrm>
-            <a:off x="7315200" y="347472"/>
-            <a:ext cx="1371600" cy="329184"/>
-          </a:xfrm>
-          <a:prstGeom prst="rect">
-            <a:avLst/>
-          </a:prstGeom>
-          <a:noFill/>
-          <a:ln/>
-        </p:spPr>
-        <p:txBody>
-          <a:bodyPr wrap="square" lIns="0" tIns="0" rIns="0" bIns="0" rtlCol="0" anchor="ctr"/>
-          <a:lstStyle/>
-          <a:p>
-            <a:pPr marL="0" indent="0" algn="ctr">
-              <a:buNone/>
-            </a:pPr>
-            <a:r>
-              <a:rPr lang="en-US" sz="1200" b="1" dirty="0">
-                <a:solidFill>
-                  <a:srgbClr val="FFFFFF"/>
-                </a:solidFill>
-                <a:latin typeface="Calibri" pitchFamily="34" charset="0"/>
-                <a:ea typeface="Calibri" pitchFamily="34" charset="-122"/>
-                <a:cs typeface="Calibri" pitchFamily="34" charset="-120"/>
-              </a:rPr>
-              <a:t>PART 2</a:t>
-            </a:r>
-            <a:endParaRPr lang="en-US" sz="1200" dirty="0"/>
-          </a:p>
-        </p:txBody>
-      </p:sp>
-      <p:graphicFrame>
-        <p:nvGraphicFramePr>
-          <p:cNvPr id="5" name="Chart 0"/>
-          <p:cNvGraphicFramePr/>
-          <p:nvPr/>
-        </p:nvGraphicFramePr>
-        <p:xfrm>
-          <a:off x="365760" y="914400"/>
-          <a:ext cx="4937760" cy="3749040"/>
-        </p:xfrm>
-        <a:graphic>
-          <a:graphicData uri="http://schemas.openxmlformats.org/drawingml/2006/chart">
-            <c:chart xmlns:c="http://schemas.openxmlformats.org/drawingml/2006/chart" xmlns:r="http://schemas.openxmlformats.org/officeDocument/2006/relationships" r:id="rId3"/>
-          </a:graphicData>
-        </a:graphic>
-      </p:graphicFrame>
-      <p:sp>
-        <p:nvSpPr>
-          <p:cNvPr id="6" name="Shape 3"/>
-          <p:cNvSpPr/>
-          <p:nvPr/>
-        </p:nvSpPr>
-        <p:spPr>
-          <a:xfrm>
-            <a:off x="5577840" y="1005840"/>
-            <a:ext cx="3108960" cy="1005840"/>
-          </a:xfrm>
-          <a:prstGeom prst="roundRect">
-            <a:avLst>
-              <a:gd name="adj" fmla="val 7273"/>
-            </a:avLst>
-          </a:prstGeom>
-          <a:solidFill>
-            <a:srgbClr val="F2F4F7"/>
-          </a:solidFill>
-          <a:ln w="12700">
-            <a:solidFill>
-              <a:srgbClr val="F2F4F7"/>
-            </a:solidFill>
-            <a:prstDash val="solid"/>
-          </a:ln>
-          <a:effectLst>
-            <a:outerShdw blurRad="76200" dist="25400" dir="5400000" algn="bl" rotWithShape="0">
-              <a:srgbClr val="000000">
-                <a:alpha val="12000"/>
-              </a:srgbClr>
-            </a:outerShdw>
-          </a:effectLst>
-        </p:spPr>
-      </p:sp>
-      <p:sp>
-        <p:nvSpPr>
-          <p:cNvPr id="7" name="Text 4"/>
-          <p:cNvSpPr txBox="1"/>
-          <p:nvPr/>
-        </p:nvSpPr>
-        <p:spPr>
-          <a:xfrm>
-            <a:off x="5715000" y="1097280"/>
-            <a:ext cx="2834640" cy="452628"/>
-          </a:xfrm>
-          <a:prstGeom prst="rect">
-            <a:avLst/>
-          </a:prstGeom>
-          <a:noFill/>
-          <a:ln/>
-        </p:spPr>
-        <p:txBody>
-          <a:bodyPr wrap="square" lIns="0" tIns="0" rIns="0" bIns="0" rtlCol="0" anchor="ctr"/>
-          <a:lstStyle/>
-          <a:p>
-            <a:pPr marL="0" indent="0">
-              <a:buNone/>
-            </a:pPr>
-            <a:r>
-              <a:rPr lang="en-US" sz="3000" b="1" dirty="0">
-                <a:solidFill>
-                  <a:srgbClr val="F57C00"/>
-                </a:solidFill>
-                <a:latin typeface="Calibri" pitchFamily="34" charset="0"/>
-                <a:ea typeface="Calibri" pitchFamily="34" charset="-122"/>
-                <a:cs typeface="Calibri" pitchFamily="34" charset="-120"/>
-              </a:rPr>
-              <a:t>88%</a:t>
-            </a:r>
-            <a:endParaRPr lang="en-US" sz="3000" dirty="0"/>
-          </a:p>
-        </p:txBody>
-      </p:sp>
-      <p:sp>
-        <p:nvSpPr>
-          <p:cNvPr id="8" name="Text 5"/>
-          <p:cNvSpPr txBox="1"/>
-          <p:nvPr/>
-        </p:nvSpPr>
-        <p:spPr>
-          <a:xfrm>
-            <a:off x="5715000" y="1559052"/>
-            <a:ext cx="2834640" cy="402336"/>
-          </a:xfrm>
-          <a:prstGeom prst="rect">
-            <a:avLst/>
-          </a:prstGeom>
-          <a:noFill/>
-          <a:ln/>
-        </p:spPr>
-        <p:txBody>
-          <a:bodyPr wrap="square" lIns="0" tIns="0" rIns="0" bIns="0" rtlCol="0" anchor="t"/>
-          <a:lstStyle/>
-          <a:p>
-            <a:pPr marL="0" indent="0">
-              <a:buNone/>
-            </a:pPr>
-            <a:r>
-              <a:rPr lang="en-US" sz="1300" dirty="0">
-                <a:solidFill>
-                  <a:srgbClr val="111111"/>
-                </a:solidFill>
-                <a:latin typeface="Calibri" pitchFamily="34" charset="0"/>
-                <a:ea typeface="Calibri" pitchFamily="34" charset="-122"/>
-                <a:cs typeface="Calibri" pitchFamily="34" charset="-120"/>
-              </a:rPr>
-              <a:t>of importance in just three features</a:t>
-            </a:r>
-            <a:endParaRPr lang="en-US" sz="1300" dirty="0"/>
-          </a:p>
-        </p:txBody>
-      </p:sp>
-      <p:sp>
-        <p:nvSpPr>
-          <p:cNvPr id="9" name="Text 6"/>
-          <p:cNvSpPr txBox="1"/>
-          <p:nvPr/>
-        </p:nvSpPr>
-        <p:spPr>
-          <a:xfrm>
-            <a:off x="5577840" y="2194560"/>
-            <a:ext cx="3108960" cy="2468880"/>
-          </a:xfrm>
-          <a:prstGeom prst="rect">
-            <a:avLst/>
-          </a:prstGeom>
-          <a:noFill/>
-          <a:ln/>
-        </p:spPr>
-        <p:txBody>
-          <a:bodyPr wrap="square" lIns="0" tIns="0" rIns="0" bIns="0" rtlCol="0" anchor="t"/>
-          <a:lstStyle/>
-          <a:p>
-            <a:pPr marL="342900" indent="-342900">
-              <a:spcAft>
-                <a:spcPts val="800"/>
-              </a:spcAft>
-              <a:buSzPct val="100000"/>
-              <a:buChar char="•"/>
-            </a:pPr>
-            <a:r>
-              <a:rPr lang="en-US" sz="1300" dirty="0">
-                <a:solidFill>
-                  <a:srgbClr val="111111"/>
-                </a:solidFill>
-                <a:latin typeface="Calibri" pitchFamily="34" charset="0"/>
-                <a:ea typeface="Calibri" pitchFamily="34" charset="-122"/>
-                <a:cs typeface="Calibri" pitchFamily="34" charset="-120"/>
-              </a:rPr>
-              <a:t>Delinquencies, score and FOIR match the 650 cliff and 55% FOIR drop from 5.2 and 5.3</a:t>
-            </a:r>
-            <a:endParaRPr lang="en-US" sz="1300" dirty="0"/>
-          </a:p>
-          <a:p>
-            <a:pPr marL="342900" indent="-342900">
-              <a:spcAft>
-                <a:spcPts val="800"/>
-              </a:spcAft>
-              <a:buSzPct val="100000"/>
-              <a:buChar char="•"/>
-            </a:pPr>
-            <a:r>
-              <a:rPr lang="en-US" sz="1300" dirty="0">
-                <a:solidFill>
-                  <a:srgbClr val="111111"/>
-                </a:solidFill>
-                <a:latin typeface="Calibri" pitchFamily="34" charset="0"/>
-                <a:ea typeface="Calibri" pitchFamily="34" charset="-122"/>
-                <a:cs typeface="Calibri" pitchFamily="34" charset="-120"/>
-              </a:rPr>
-              <a:t>Importance shows how much, not which direction: keep logistic coefficients and add reason codes for each auto-decline</a:t>
-            </a:r>
-            <a:endParaRPr lang="en-US" sz="1300" dirty="0"/>
           </a:p>
         </p:txBody>
       </p:sp>
@@ -21789,6 +22056,336 @@
 
 <file path=ppt/slides/slide20.xml><?xml version="1.0" encoding="utf-8"?>
 <p:sld xmlns:a="http://schemas.openxmlformats.org/drawingml/2006/main" xmlns:r="http://schemas.openxmlformats.org/officeDocument/2006/relationships" xmlns:p="http://schemas.openxmlformats.org/presentationml/2006/main">
+  <p:cSld name="Slide 18">
+    <p:bg>
+      <p:bgPr>
+        <a:solidFill>
+          <a:srgbClr val="FFFFFF"/>
+        </a:solidFill>
+        <a:effectLst/>
+      </p:bgPr>
+    </p:bg>
+    <p:spTree>
+      <p:nvGrpSpPr>
+        <p:cNvPr id="1" name=""/>
+        <p:cNvGrpSpPr/>
+        <p:nvPr/>
+      </p:nvGrpSpPr>
+      <p:grpSpPr>
+        <a:xfrm>
+          <a:off x="0" y="0"/>
+          <a:ext cx="0" cy="0"/>
+          <a:chOff x="0" y="0"/>
+          <a:chExt cx="0" cy="0"/>
+        </a:xfrm>
+      </p:grpSpPr>
+      <p:sp>
+        <p:nvSpPr>
+          <p:cNvPr id="2" name="Text 0"/>
+          <p:cNvSpPr txBox="1"/>
+          <p:nvPr/>
+        </p:nvSpPr>
+        <p:spPr>
+          <a:xfrm>
+            <a:off x="457200" y="274320"/>
+            <a:ext cx="6766560" cy="548640"/>
+          </a:xfrm>
+          <a:prstGeom prst="rect">
+            <a:avLst/>
+          </a:prstGeom>
+          <a:noFill/>
+          <a:ln/>
+        </p:spPr>
+        <p:txBody>
+          <a:bodyPr wrap="square" lIns="0" tIns="0" rIns="0" bIns="0" rtlCol="0" anchor="ctr"/>
+          <a:lstStyle/>
+          <a:p>
+            <a:pPr marL="0" indent="0">
+              <a:buNone/>
+            </a:pPr>
+            <a:r>
+              <a:rPr lang="en-US" sz="2800" b="1" dirty="0">
+                <a:solidFill>
+                  <a:srgbClr val="111111"/>
+                </a:solidFill>
+                <a:latin typeface="Calibri" pitchFamily="34" charset="0"/>
+                <a:ea typeface="Calibri" pitchFamily="34" charset="-122"/>
+                <a:cs typeface="Calibri" pitchFamily="34" charset="-120"/>
+              </a:rPr>
+              <a:t>Feature importances (top 8)</a:t>
+            </a:r>
+            <a:endParaRPr lang="en-US" sz="2800" dirty="0"/>
+          </a:p>
+        </p:txBody>
+      </p:sp>
+      <p:sp>
+        <p:nvSpPr>
+          <p:cNvPr id="3" name="Shape 1"/>
+          <p:cNvSpPr/>
+          <p:nvPr/>
+        </p:nvSpPr>
+        <p:spPr>
+          <a:xfrm>
+            <a:off x="7315200" y="347472"/>
+            <a:ext cx="1371600" cy="329184"/>
+          </a:xfrm>
+          <a:prstGeom prst="roundRect">
+            <a:avLst>
+              <a:gd name="adj" fmla="val 27778"/>
+            </a:avLst>
+          </a:prstGeom>
+          <a:solidFill>
+            <a:srgbClr val="1565C0"/>
+          </a:solidFill>
+          <a:ln w="12700">
+            <a:solidFill>
+              <a:srgbClr val="1565C0"/>
+            </a:solidFill>
+            <a:prstDash val="solid"/>
+          </a:ln>
+        </p:spPr>
+      </p:sp>
+      <p:sp>
+        <p:nvSpPr>
+          <p:cNvPr id="4" name="Text 2"/>
+          <p:cNvSpPr txBox="1"/>
+          <p:nvPr/>
+        </p:nvSpPr>
+        <p:spPr>
+          <a:xfrm>
+            <a:off x="7315200" y="347472"/>
+            <a:ext cx="1371600" cy="329184"/>
+          </a:xfrm>
+          <a:prstGeom prst="rect">
+            <a:avLst/>
+          </a:prstGeom>
+          <a:noFill/>
+          <a:ln/>
+        </p:spPr>
+        <p:txBody>
+          <a:bodyPr wrap="square" lIns="0" tIns="0" rIns="0" bIns="0" rtlCol="0" anchor="ctr"/>
+          <a:lstStyle/>
+          <a:p>
+            <a:pPr marL="0" indent="0" algn="ctr">
+              <a:buNone/>
+            </a:pPr>
+            <a:r>
+              <a:rPr lang="en-US" sz="1200" b="1" dirty="0">
+                <a:solidFill>
+                  <a:srgbClr val="FFFFFF"/>
+                </a:solidFill>
+                <a:latin typeface="Calibri" pitchFamily="34" charset="0"/>
+                <a:ea typeface="Calibri" pitchFamily="34" charset="-122"/>
+                <a:cs typeface="Calibri" pitchFamily="34" charset="-120"/>
+              </a:rPr>
+              <a:t>PART 2</a:t>
+            </a:r>
+            <a:endParaRPr lang="en-US" sz="1200" dirty="0"/>
+          </a:p>
+        </p:txBody>
+      </p:sp>
+      <p:graphicFrame>
+        <p:nvGraphicFramePr>
+          <p:cNvPr id="5" name="Chart 0"/>
+          <p:cNvGraphicFramePr/>
+          <p:nvPr/>
+        </p:nvGraphicFramePr>
+        <p:xfrm>
+          <a:off x="365760" y="914400"/>
+          <a:ext cx="4937760" cy="3749040"/>
+        </p:xfrm>
+        <a:graphic>
+          <a:graphicData uri="http://schemas.openxmlformats.org/drawingml/2006/chart">
+            <c:chart xmlns:c="http://schemas.openxmlformats.org/drawingml/2006/chart" xmlns:r="http://schemas.openxmlformats.org/officeDocument/2006/relationships" r:id="rId3"/>
+          </a:graphicData>
+        </a:graphic>
+      </p:graphicFrame>
+      <p:sp>
+        <p:nvSpPr>
+          <p:cNvPr id="6" name="Shape 3"/>
+          <p:cNvSpPr/>
+          <p:nvPr/>
+        </p:nvSpPr>
+        <p:spPr>
+          <a:xfrm>
+            <a:off x="5577840" y="1005840"/>
+            <a:ext cx="3108960" cy="1005840"/>
+          </a:xfrm>
+          <a:prstGeom prst="roundRect">
+            <a:avLst>
+              <a:gd name="adj" fmla="val 7273"/>
+            </a:avLst>
+          </a:prstGeom>
+          <a:solidFill>
+            <a:srgbClr val="F2F4F7"/>
+          </a:solidFill>
+          <a:ln w="12700">
+            <a:solidFill>
+              <a:srgbClr val="F2F4F7"/>
+            </a:solidFill>
+            <a:prstDash val="solid"/>
+          </a:ln>
+          <a:effectLst>
+            <a:outerShdw blurRad="76200" dist="25400" dir="5400000" algn="bl" rotWithShape="0">
+              <a:srgbClr val="000000">
+                <a:alpha val="12000"/>
+              </a:srgbClr>
+            </a:outerShdw>
+          </a:effectLst>
+        </p:spPr>
+      </p:sp>
+      <p:sp>
+        <p:nvSpPr>
+          <p:cNvPr id="7" name="Text 4"/>
+          <p:cNvSpPr txBox="1"/>
+          <p:nvPr/>
+        </p:nvSpPr>
+        <p:spPr>
+          <a:xfrm>
+            <a:off x="5715000" y="1097280"/>
+            <a:ext cx="2834640" cy="452628"/>
+          </a:xfrm>
+          <a:prstGeom prst="rect">
+            <a:avLst/>
+          </a:prstGeom>
+          <a:noFill/>
+          <a:ln/>
+        </p:spPr>
+        <p:txBody>
+          <a:bodyPr wrap="square" lIns="0" tIns="0" rIns="0" bIns="0" rtlCol="0" anchor="ctr"/>
+          <a:lstStyle/>
+          <a:p>
+            <a:pPr marL="0" indent="0">
+              <a:buNone/>
+            </a:pPr>
+            <a:r>
+              <a:rPr lang="en-US" sz="3000" b="1" dirty="0">
+                <a:solidFill>
+                  <a:srgbClr val="F57C00"/>
+                </a:solidFill>
+                <a:latin typeface="Calibri" pitchFamily="34" charset="0"/>
+                <a:ea typeface="Calibri" pitchFamily="34" charset="-122"/>
+                <a:cs typeface="Calibri" pitchFamily="34" charset="-120"/>
+              </a:rPr>
+              <a:t>88%</a:t>
+            </a:r>
+            <a:endParaRPr lang="en-US" sz="3000" dirty="0"/>
+          </a:p>
+        </p:txBody>
+      </p:sp>
+      <p:sp>
+        <p:nvSpPr>
+          <p:cNvPr id="8" name="Text 5"/>
+          <p:cNvSpPr txBox="1"/>
+          <p:nvPr/>
+        </p:nvSpPr>
+        <p:spPr>
+          <a:xfrm>
+            <a:off x="5715000" y="1559052"/>
+            <a:ext cx="2834640" cy="402336"/>
+          </a:xfrm>
+          <a:prstGeom prst="rect">
+            <a:avLst/>
+          </a:prstGeom>
+          <a:noFill/>
+          <a:ln/>
+        </p:spPr>
+        <p:txBody>
+          <a:bodyPr wrap="square" lIns="0" tIns="0" rIns="0" bIns="0" rtlCol="0" anchor="t"/>
+          <a:lstStyle/>
+          <a:p>
+            <a:pPr marL="0" indent="0">
+              <a:buNone/>
+            </a:pPr>
+            <a:r>
+              <a:rPr lang="en-US" sz="1300" dirty="0">
+                <a:solidFill>
+                  <a:srgbClr val="111111"/>
+                </a:solidFill>
+                <a:latin typeface="Calibri" pitchFamily="34" charset="0"/>
+                <a:ea typeface="Calibri" pitchFamily="34" charset="-122"/>
+                <a:cs typeface="Calibri" pitchFamily="34" charset="-120"/>
+              </a:rPr>
+              <a:t>of importance in just three features</a:t>
+            </a:r>
+            <a:endParaRPr lang="en-US" sz="1300" dirty="0"/>
+          </a:p>
+        </p:txBody>
+      </p:sp>
+      <p:sp>
+        <p:nvSpPr>
+          <p:cNvPr id="9" name="Text 6"/>
+          <p:cNvSpPr txBox="1"/>
+          <p:nvPr/>
+        </p:nvSpPr>
+        <p:spPr>
+          <a:xfrm>
+            <a:off x="5577840" y="2194560"/>
+            <a:ext cx="3108960" cy="2468880"/>
+          </a:xfrm>
+          <a:prstGeom prst="rect">
+            <a:avLst/>
+          </a:prstGeom>
+          <a:noFill/>
+          <a:ln/>
+        </p:spPr>
+        <p:txBody>
+          <a:bodyPr wrap="square" lIns="0" tIns="0" rIns="0" bIns="0" rtlCol="0" anchor="t"/>
+          <a:lstStyle/>
+          <a:p>
+            <a:pPr marL="342900" indent="-342900">
+              <a:spcAft>
+                <a:spcPts val="800"/>
+              </a:spcAft>
+              <a:buSzPct val="100000"/>
+              <a:buChar char="•"/>
+            </a:pPr>
+            <a:r>
+              <a:rPr lang="en-US" sz="1300" dirty="0">
+                <a:solidFill>
+                  <a:srgbClr val="111111"/>
+                </a:solidFill>
+                <a:latin typeface="Calibri" pitchFamily="34" charset="0"/>
+                <a:ea typeface="Calibri" pitchFamily="34" charset="-122"/>
+                <a:cs typeface="Calibri" pitchFamily="34" charset="-120"/>
+              </a:rPr>
+              <a:t>Delinquencies, score and FOIR match the 650 cliff and 55% FOIR drop from 5.2 and 5.3</a:t>
+            </a:r>
+            <a:endParaRPr lang="en-US" sz="1300" dirty="0"/>
+          </a:p>
+          <a:p>
+            <a:pPr marL="342900" indent="-342900">
+              <a:spcAft>
+                <a:spcPts val="800"/>
+              </a:spcAft>
+              <a:buSzPct val="100000"/>
+              <a:buChar char="•"/>
+            </a:pPr>
+            <a:r>
+              <a:rPr lang="en-US" sz="1300" dirty="0">
+                <a:solidFill>
+                  <a:srgbClr val="111111"/>
+                </a:solidFill>
+                <a:latin typeface="Calibri" pitchFamily="34" charset="0"/>
+                <a:ea typeface="Calibri" pitchFamily="34" charset="-122"/>
+                <a:cs typeface="Calibri" pitchFamily="34" charset="-120"/>
+              </a:rPr>
+              <a:t>Importance shows how much, not which direction: keep logistic coefficients and add reason codes for each auto-decline</a:t>
+            </a:r>
+            <a:endParaRPr lang="en-US" sz="1300" dirty="0"/>
+          </a:p>
+        </p:txBody>
+      </p:sp>
+    </p:spTree>
+  </p:cSld>
+  <p:clrMapOvr>
+    <a:masterClrMapping/>
+  </p:clrMapOvr>
+</p:sld>
+</file>
+
+<file path=ppt/slides/slide21.xml><?xml version="1.0" encoding="utf-8"?>
+<p:sld xmlns:a="http://schemas.openxmlformats.org/drawingml/2006/main" xmlns:r="http://schemas.openxmlformats.org/officeDocument/2006/relationships" xmlns:p="http://schemas.openxmlformats.org/presentationml/2006/main">
   <p:cSld name="Slide 19">
     <p:bg>
       <p:bgPr>
@@ -23568,7 +24165,7 @@
 </p:sld>
 </file>
 
-<file path=ppt/slides/slide21.xml><?xml version="1.0" encoding="utf-8"?>
+<file path=ppt/slides/slide22.xml><?xml version="1.0" encoding="utf-8"?>
 <p:sld xmlns:a="http://schemas.openxmlformats.org/drawingml/2006/main" xmlns:r="http://schemas.openxmlformats.org/officeDocument/2006/relationships" xmlns:p="http://schemas.openxmlformats.org/presentationml/2006/main">
   <p:cSld name="Slide 20">
     <p:bg>
@@ -23985,7 +24582,7 @@
 </p:sld>
 </file>
 
-<file path=ppt/slides/slide22.xml><?xml version="1.0" encoding="utf-8"?>
+<file path=ppt/slides/slide23.xml><?xml version="1.0" encoding="utf-8"?>
 <p:sld xmlns:a="http://schemas.openxmlformats.org/drawingml/2006/main" xmlns:r="http://schemas.openxmlformats.org/officeDocument/2006/relationships" xmlns:p="http://schemas.openxmlformats.org/presentationml/2006/main">
   <p:cSld name="Slide 21">
     <p:bg>
@@ -24224,7 +24821,7 @@
 </p:sld>
 </file>
 
-<file path=ppt/slides/slide23.xml><?xml version="1.0" encoding="utf-8"?>
+<file path=ppt/slides/slide24.xml><?xml version="1.0" encoding="utf-8"?>
 <p:sld xmlns:a="http://schemas.openxmlformats.org/drawingml/2006/main" xmlns:r="http://schemas.openxmlformats.org/officeDocument/2006/relationships" xmlns:p="http://schemas.openxmlformats.org/presentationml/2006/main">
   <p:cSld name="Slide 22">
     <p:bg>
@@ -24876,7 +25473,7 @@
 </p:sld>
 </file>
 
-<file path=ppt/slides/slide24.xml><?xml version="1.0" encoding="utf-8"?>
+<file path=ppt/slides/slide25.xml><?xml version="1.0" encoding="utf-8"?>
 <p:sld xmlns:a="http://schemas.openxmlformats.org/drawingml/2006/main" xmlns:r="http://schemas.openxmlformats.org/officeDocument/2006/relationships" xmlns:p="http://schemas.openxmlformats.org/presentationml/2006/main">
   <p:cSld name="Slide 23">
     <p:bg>
@@ -25090,7 +25687,7 @@
 </p:sld>
 </file>
 
-<file path=ppt/slides/slide25.xml><?xml version="1.0" encoding="utf-8"?>
+<file path=ppt/slides/slide26.xml><?xml version="1.0" encoding="utf-8"?>
 <p:sld xmlns:a="http://schemas.openxmlformats.org/drawingml/2006/main" xmlns:r="http://schemas.openxmlformats.org/officeDocument/2006/relationships" xmlns:p="http://schemas.openxmlformats.org/presentationml/2006/main">
   <p:cSld name="Slide 24">
     <p:bg>
@@ -25299,7 +25896,7 @@
 </p:sld>
 </file>
 
-<file path=ppt/slides/slide26.xml><?xml version="1.0" encoding="utf-8"?>
+<file path=ppt/slides/slide27.xml><?xml version="1.0" encoding="utf-8"?>
 <p:sld xmlns:a="http://schemas.openxmlformats.org/drawingml/2006/main" xmlns:r="http://schemas.openxmlformats.org/officeDocument/2006/relationships" xmlns:p="http://schemas.openxmlformats.org/presentationml/2006/main">
   <p:cSld name="Slide 25">
     <p:bg>
@@ -27968,7 +28565,7 @@
 </p:sld>
 </file>
 
-<file path=ppt/slides/slide27.xml><?xml version="1.0" encoding="utf-8"?>
+<file path=ppt/slides/slide28.xml><?xml version="1.0" encoding="utf-8"?>
 <p:sld xmlns:a="http://schemas.openxmlformats.org/drawingml/2006/main" xmlns:r="http://schemas.openxmlformats.org/officeDocument/2006/relationships" xmlns:p="http://schemas.openxmlformats.org/presentationml/2006/main">
   <p:cSld name="Slide 26">
     <p:bg>
@@ -28298,7 +28895,7 @@
 </p:sld>
 </file>
 
-<file path=ppt/slides/slide28.xml><?xml version="1.0" encoding="utf-8"?>
+<file path=ppt/slides/slide29.xml><?xml version="1.0" encoding="utf-8"?>
 <p:sld xmlns:a="http://schemas.openxmlformats.org/drawingml/2006/main" xmlns:r="http://schemas.openxmlformats.org/officeDocument/2006/relationships" xmlns:p="http://schemas.openxmlformats.org/presentationml/2006/main">
   <p:cSld>
     <p:bg>
@@ -29167,6 +29764,13 @@
           </a:prstGeom>
           <a:noFill/>
           <a:ln/>
+          <a:effectLst>
+            <a:outerShdw blurRad="76200" dir="13500000" sy="23000" kx="1200000" algn="br" rotWithShape="0">
+              <a:prstClr val="black">
+                <a:alpha val="20000"/>
+              </a:prstClr>
+            </a:outerShdw>
+          </a:effectLst>
         </p:spPr>
         <p:txBody>
           <a:bodyPr wrap="square" lIns="0" tIns="0" rIns="0" bIns="0" rtlCol="0" anchor="ctr"/>
@@ -30689,6 +31293,103 @@
 
 <file path=ppt/slides/slide7.xml><?xml version="1.0" encoding="utf-8"?>
 <p:sld xmlns:a="http://schemas.openxmlformats.org/drawingml/2006/main" xmlns:r="http://schemas.openxmlformats.org/officeDocument/2006/relationships" xmlns:p="http://schemas.openxmlformats.org/presentationml/2006/main">
+  <p:cSld>
+    <p:bg>
+      <p:bgPr>
+        <a:solidFill>
+          <a:srgbClr val="111111"/>
+        </a:solidFill>
+        <a:effectLst/>
+      </p:bgPr>
+    </p:bg>
+    <p:spTree>
+      <p:nvGrpSpPr>
+        <p:cNvPr id="1" name="">
+          <a:extLst>
+            <a:ext uri="{FF2B5EF4-FFF2-40B4-BE49-F238E27FC236}">
+              <a16:creationId xmlns:a16="http://schemas.microsoft.com/office/drawing/2014/main" id="{8D1245B9-26FB-6996-9740-A29939FF0FFA}"/>
+            </a:ext>
+          </a:extLst>
+        </p:cNvPr>
+        <p:cNvGrpSpPr/>
+        <p:nvPr/>
+      </p:nvGrpSpPr>
+      <p:grpSpPr>
+        <a:xfrm>
+          <a:off x="0" y="0"/>
+          <a:ext cx="0" cy="0"/>
+          <a:chOff x="0" y="0"/>
+          <a:chExt cx="0" cy="0"/>
+        </a:xfrm>
+      </p:grpSpPr>
+      <p:sp>
+        <p:nvSpPr>
+          <p:cNvPr id="5" name="Text 3">
+            <a:extLst>
+              <a:ext uri="{FF2B5EF4-FFF2-40B4-BE49-F238E27FC236}">
+                <a16:creationId xmlns:a16="http://schemas.microsoft.com/office/drawing/2014/main" id="{CCCFB5A1-D58C-0D08-1A78-1641B97BB220}"/>
+              </a:ext>
+            </a:extLst>
+          </p:cNvPr>
+          <p:cNvSpPr txBox="1"/>
+          <p:nvPr/>
+        </p:nvSpPr>
+        <p:spPr>
+          <a:xfrm>
+            <a:off x="3373121" y="1954107"/>
+            <a:ext cx="2390986" cy="1097280"/>
+          </a:xfrm>
+          <a:prstGeom prst="rect">
+            <a:avLst/>
+          </a:prstGeom>
+          <a:noFill/>
+          <a:ln/>
+        </p:spPr>
+        <p:txBody>
+          <a:bodyPr wrap="square" lIns="0" tIns="0" rIns="0" bIns="0" rtlCol="0" anchor="t"/>
+          <a:lstStyle/>
+          <a:p>
+            <a:r>
+              <a:rPr lang="en-US" sz="7200" b="1" dirty="0">
+                <a:solidFill>
+                  <a:srgbClr val="FFFFFF"/>
+                </a:solidFill>
+                <a:latin typeface="Calibri" pitchFamily="34" charset="0"/>
+                <a:ea typeface="Calibri" pitchFamily="34" charset="-122"/>
+                <a:cs typeface="Calibri" pitchFamily="34" charset="-120"/>
+              </a:rPr>
+              <a:t>FOIR</a:t>
+            </a:r>
+            <a:r>
+              <a:rPr lang="en-US" sz="7200" b="1" dirty="0">
+                <a:solidFill>
+                  <a:srgbClr val="F57C00"/>
+                </a:solidFill>
+                <a:latin typeface="Calibri" pitchFamily="34" charset="0"/>
+                <a:ea typeface="Calibri" pitchFamily="34" charset="-122"/>
+                <a:cs typeface="Calibri" pitchFamily="34" charset="-120"/>
+              </a:rPr>
+              <a:t>?</a:t>
+            </a:r>
+            <a:endParaRPr lang="en-US" sz="7200" dirty="0"/>
+          </a:p>
+        </p:txBody>
+      </p:sp>
+    </p:spTree>
+    <p:extLst>
+      <p:ext uri="{BB962C8B-B14F-4D97-AF65-F5344CB8AC3E}">
+        <p14:creationId xmlns:p14="http://schemas.microsoft.com/office/powerpoint/2010/main" val="1257846425"/>
+      </p:ext>
+    </p:extLst>
+  </p:cSld>
+  <p:clrMapOvr>
+    <a:masterClrMapping/>
+  </p:clrMapOvr>
+</p:sld>
+</file>
+
+<file path=ppt/slides/slide8.xml><?xml version="1.0" encoding="utf-8"?>
+<p:sld xmlns:a="http://schemas.openxmlformats.org/drawingml/2006/main" xmlns:r="http://schemas.openxmlformats.org/officeDocument/2006/relationships" xmlns:p="http://schemas.openxmlformats.org/presentationml/2006/main">
   <p:cSld name="Slide 6">
     <p:bg>
       <p:bgPr>
@@ -30942,7 +31643,7 @@
 </p:sld>
 </file>
 
-<file path=ppt/slides/slide8.xml><?xml version="1.0" encoding="utf-8"?>
+<file path=ppt/slides/slide9.xml><?xml version="1.0" encoding="utf-8"?>
 <p:sld xmlns:a="http://schemas.openxmlformats.org/drawingml/2006/main" xmlns:r="http://schemas.openxmlformats.org/officeDocument/2006/relationships" xmlns:p="http://schemas.openxmlformats.org/presentationml/2006/main">
   <p:cSld name="Slide 7">
     <p:bg>
@@ -31173,462 +31874,6 @@
           </a:p>
         </p:txBody>
       </p:sp>
-    </p:spTree>
-  </p:cSld>
-  <p:clrMapOvr>
-    <a:masterClrMapping/>
-  </p:clrMapOvr>
-</p:sld>
-</file>
-
-<file path=ppt/slides/slide9.xml><?xml version="1.0" encoding="utf-8"?>
-<p:sld xmlns:a="http://schemas.openxmlformats.org/drawingml/2006/main" xmlns:r="http://schemas.openxmlformats.org/officeDocument/2006/relationships" xmlns:p="http://schemas.openxmlformats.org/presentationml/2006/main">
-  <p:cSld name="Slide 8">
-    <p:bg>
-      <p:bgPr>
-        <a:solidFill>
-          <a:srgbClr val="FFFFFF"/>
-        </a:solidFill>
-        <a:effectLst/>
-      </p:bgPr>
-    </p:bg>
-    <p:spTree>
-      <p:nvGrpSpPr>
-        <p:cNvPr id="1" name=""/>
-        <p:cNvGrpSpPr/>
-        <p:nvPr/>
-      </p:nvGrpSpPr>
-      <p:grpSpPr>
-        <a:xfrm>
-          <a:off x="0" y="0"/>
-          <a:ext cx="0" cy="0"/>
-          <a:chOff x="0" y="0"/>
-          <a:chExt cx="0" cy="0"/>
-        </a:xfrm>
-      </p:grpSpPr>
-      <p:sp>
-        <p:nvSpPr>
-          <p:cNvPr id="2" name="Text 0"/>
-          <p:cNvSpPr txBox="1"/>
-          <p:nvPr/>
-        </p:nvSpPr>
-        <p:spPr>
-          <a:xfrm>
-            <a:off x="457200" y="274320"/>
-            <a:ext cx="6766560" cy="548640"/>
-          </a:xfrm>
-          <a:prstGeom prst="rect">
-            <a:avLst/>
-          </a:prstGeom>
-          <a:noFill/>
-          <a:ln/>
-        </p:spPr>
-        <p:txBody>
-          <a:bodyPr wrap="square" lIns="0" tIns="0" rIns="0" bIns="0" rtlCol="0" anchor="ctr"/>
-          <a:lstStyle/>
-          <a:p>
-            <a:pPr marL="0" indent="0">
-              <a:buNone/>
-            </a:pPr>
-            <a:r>
-              <a:rPr lang="en-US" sz="2800" b="1" dirty="0">
-                <a:solidFill>
-                  <a:srgbClr val="111111"/>
-                </a:solidFill>
-                <a:latin typeface="Calibri" pitchFamily="34" charset="0"/>
-                <a:ea typeface="Calibri" pitchFamily="34" charset="-122"/>
-                <a:cs typeface="Calibri" pitchFamily="34" charset="-120"/>
-              </a:rPr>
-              <a:t>Logistic regression baseline</a:t>
-            </a:r>
-            <a:endParaRPr lang="en-US" sz="2800" dirty="0"/>
-          </a:p>
-        </p:txBody>
-      </p:sp>
-      <p:sp>
-        <p:nvSpPr>
-          <p:cNvPr id="3" name="Shape 1"/>
-          <p:cNvSpPr/>
-          <p:nvPr/>
-        </p:nvSpPr>
-        <p:spPr>
-          <a:xfrm>
-            <a:off x="7315200" y="347472"/>
-            <a:ext cx="1371600" cy="329184"/>
-          </a:xfrm>
-          <a:prstGeom prst="roundRect">
-            <a:avLst>
-              <a:gd name="adj" fmla="val 27778"/>
-            </a:avLst>
-          </a:prstGeom>
-          <a:solidFill>
-            <a:srgbClr val="F57C00"/>
-          </a:solidFill>
-          <a:ln w="12700">
-            <a:solidFill>
-              <a:srgbClr val="F57C00"/>
-            </a:solidFill>
-            <a:prstDash val="solid"/>
-          </a:ln>
-        </p:spPr>
-      </p:sp>
-      <p:sp>
-        <p:nvSpPr>
-          <p:cNvPr id="4" name="Text 2"/>
-          <p:cNvSpPr txBox="1"/>
-          <p:nvPr/>
-        </p:nvSpPr>
-        <p:spPr>
-          <a:xfrm>
-            <a:off x="7315200" y="347472"/>
-            <a:ext cx="1371600" cy="329184"/>
-          </a:xfrm>
-          <a:prstGeom prst="rect">
-            <a:avLst/>
-          </a:prstGeom>
-          <a:noFill/>
-          <a:ln/>
-        </p:spPr>
-        <p:txBody>
-          <a:bodyPr wrap="square" lIns="0" tIns="0" rIns="0" bIns="0" rtlCol="0" anchor="ctr"/>
-          <a:lstStyle/>
-          <a:p>
-            <a:pPr marL="0" indent="0" algn="ctr">
-              <a:buNone/>
-            </a:pPr>
-            <a:r>
-              <a:rPr lang="en-US" sz="1200" b="1" dirty="0">
-                <a:solidFill>
-                  <a:srgbClr val="FFFFFF"/>
-                </a:solidFill>
-                <a:latin typeface="Calibri" pitchFamily="34" charset="0"/>
-                <a:ea typeface="Calibri" pitchFamily="34" charset="-122"/>
-                <a:cs typeface="Calibri" pitchFamily="34" charset="-120"/>
-              </a:rPr>
-              <a:t>PART 1</a:t>
-            </a:r>
-            <a:endParaRPr lang="en-US" sz="1200" dirty="0"/>
-          </a:p>
-        </p:txBody>
-      </p:sp>
-      <p:sp>
-        <p:nvSpPr>
-          <p:cNvPr id="5" name="Shape 3"/>
-          <p:cNvSpPr/>
-          <p:nvPr/>
-        </p:nvSpPr>
-        <p:spPr>
-          <a:xfrm>
-            <a:off x="457200" y="1005840"/>
-            <a:ext cx="1920240" cy="1005840"/>
-          </a:xfrm>
-          <a:prstGeom prst="roundRect">
-            <a:avLst>
-              <a:gd name="adj" fmla="val 7273"/>
-            </a:avLst>
-          </a:prstGeom>
-          <a:solidFill>
-            <a:srgbClr val="F2F4F7"/>
-          </a:solidFill>
-          <a:ln w="12700">
-            <a:solidFill>
-              <a:srgbClr val="F2F4F7"/>
-            </a:solidFill>
-            <a:prstDash val="solid"/>
-          </a:ln>
-          <a:effectLst>
-            <a:outerShdw blurRad="76200" dist="25400" dir="5400000" algn="bl" rotWithShape="0">
-              <a:srgbClr val="000000">
-                <a:alpha val="12000"/>
-              </a:srgbClr>
-            </a:outerShdw>
-          </a:effectLst>
-        </p:spPr>
-      </p:sp>
-      <p:sp>
-        <p:nvSpPr>
-          <p:cNvPr id="6" name="Text 4"/>
-          <p:cNvSpPr txBox="1"/>
-          <p:nvPr/>
-        </p:nvSpPr>
-        <p:spPr>
-          <a:xfrm>
-            <a:off x="594360" y="1097280"/>
-            <a:ext cx="1645920" cy="452628"/>
-          </a:xfrm>
-          <a:prstGeom prst="rect">
-            <a:avLst/>
-          </a:prstGeom>
-          <a:noFill/>
-          <a:ln/>
-        </p:spPr>
-        <p:txBody>
-          <a:bodyPr wrap="square" lIns="0" tIns="0" rIns="0" bIns="0" rtlCol="0" anchor="ctr"/>
-          <a:lstStyle/>
-          <a:p>
-            <a:pPr marL="0" indent="0">
-              <a:buNone/>
-            </a:pPr>
-            <a:r>
-              <a:rPr lang="en-US" sz="3000" b="1" dirty="0">
-                <a:solidFill>
-                  <a:srgbClr val="1565C0"/>
-                </a:solidFill>
-                <a:latin typeface="Calibri" pitchFamily="34" charset="0"/>
-                <a:ea typeface="Calibri" pitchFamily="34" charset="-122"/>
-                <a:cs typeface="Calibri" pitchFamily="34" charset="-120"/>
-              </a:rPr>
-              <a:t>79.1%</a:t>
-            </a:r>
-            <a:endParaRPr lang="en-US" sz="3000" dirty="0"/>
-          </a:p>
-        </p:txBody>
-      </p:sp>
-      <p:sp>
-        <p:nvSpPr>
-          <p:cNvPr id="7" name="Text 5"/>
-          <p:cNvSpPr txBox="1"/>
-          <p:nvPr/>
-        </p:nvSpPr>
-        <p:spPr>
-          <a:xfrm>
-            <a:off x="594360" y="1559052"/>
-            <a:ext cx="1645920" cy="402336"/>
-          </a:xfrm>
-          <a:prstGeom prst="rect">
-            <a:avLst/>
-          </a:prstGeom>
-          <a:noFill/>
-          <a:ln/>
-        </p:spPr>
-        <p:txBody>
-          <a:bodyPr wrap="square" lIns="0" tIns="0" rIns="0" bIns="0" rtlCol="0" anchor="t"/>
-          <a:lstStyle/>
-          <a:p>
-            <a:pPr marL="0" indent="0">
-              <a:buNone/>
-            </a:pPr>
-            <a:r>
-              <a:rPr lang="en-US" sz="1300" dirty="0">
-                <a:solidFill>
-                  <a:srgbClr val="111111"/>
-                </a:solidFill>
-                <a:latin typeface="Calibri" pitchFamily="34" charset="0"/>
-                <a:ea typeface="Calibri" pitchFamily="34" charset="-122"/>
-                <a:cs typeface="Calibri" pitchFamily="34" charset="-120"/>
-              </a:rPr>
-              <a:t>accuracy at 0.5 cut-off</a:t>
-            </a:r>
-            <a:endParaRPr lang="en-US" sz="1300" dirty="0"/>
-          </a:p>
-        </p:txBody>
-      </p:sp>
-      <p:sp>
-        <p:nvSpPr>
-          <p:cNvPr id="8" name="Shape 6"/>
-          <p:cNvSpPr/>
-          <p:nvPr/>
-        </p:nvSpPr>
-        <p:spPr>
-          <a:xfrm>
-            <a:off x="2514600" y="1005840"/>
-            <a:ext cx="1920240" cy="1005840"/>
-          </a:xfrm>
-          <a:prstGeom prst="roundRect">
-            <a:avLst>
-              <a:gd name="adj" fmla="val 7273"/>
-            </a:avLst>
-          </a:prstGeom>
-          <a:solidFill>
-            <a:srgbClr val="F2F4F7"/>
-          </a:solidFill>
-          <a:ln w="12700">
-            <a:solidFill>
-              <a:srgbClr val="F2F4F7"/>
-            </a:solidFill>
-            <a:prstDash val="solid"/>
-          </a:ln>
-          <a:effectLst>
-            <a:outerShdw blurRad="76200" dist="25400" dir="5400000" algn="bl" rotWithShape="0">
-              <a:srgbClr val="000000">
-                <a:alpha val="12000"/>
-              </a:srgbClr>
-            </a:outerShdw>
-          </a:effectLst>
-        </p:spPr>
-      </p:sp>
-      <p:sp>
-        <p:nvSpPr>
-          <p:cNvPr id="9" name="Text 7"/>
-          <p:cNvSpPr txBox="1"/>
-          <p:nvPr/>
-        </p:nvSpPr>
-        <p:spPr>
-          <a:xfrm>
-            <a:off x="2651760" y="1097280"/>
-            <a:ext cx="1645920" cy="452628"/>
-          </a:xfrm>
-          <a:prstGeom prst="rect">
-            <a:avLst/>
-          </a:prstGeom>
-          <a:noFill/>
-          <a:ln/>
-        </p:spPr>
-        <p:txBody>
-          <a:bodyPr wrap="square" lIns="0" tIns="0" rIns="0" bIns="0" rtlCol="0" anchor="ctr"/>
-          <a:lstStyle/>
-          <a:p>
-            <a:pPr marL="0" indent="0">
-              <a:buNone/>
-            </a:pPr>
-            <a:r>
-              <a:rPr lang="en-US" sz="3000" b="1" dirty="0">
-                <a:solidFill>
-                  <a:srgbClr val="F57C00"/>
-                </a:solidFill>
-                <a:latin typeface="Calibri" pitchFamily="34" charset="0"/>
-                <a:ea typeface="Calibri" pitchFamily="34" charset="-122"/>
-                <a:cs typeface="Calibri" pitchFamily="34" charset="-120"/>
-              </a:rPr>
-              <a:t>17.7%</a:t>
-            </a:r>
-            <a:endParaRPr lang="en-US" sz="3000" dirty="0"/>
-          </a:p>
-        </p:txBody>
-      </p:sp>
-      <p:sp>
-        <p:nvSpPr>
-          <p:cNvPr id="10" name="Text 8"/>
-          <p:cNvSpPr txBox="1"/>
-          <p:nvPr/>
-        </p:nvSpPr>
-        <p:spPr>
-          <a:xfrm>
-            <a:off x="2651760" y="1559052"/>
-            <a:ext cx="1645920" cy="402336"/>
-          </a:xfrm>
-          <a:prstGeom prst="rect">
-            <a:avLst/>
-          </a:prstGeom>
-          <a:noFill/>
-          <a:ln/>
-        </p:spPr>
-        <p:txBody>
-          <a:bodyPr wrap="square" lIns="0" tIns="0" rIns="0" bIns="0" rtlCol="0" anchor="t"/>
-          <a:lstStyle/>
-          <a:p>
-            <a:pPr marL="0" indent="0">
-              <a:buNone/>
-            </a:pPr>
-            <a:r>
-              <a:rPr lang="en-US" sz="1300" dirty="0">
-                <a:solidFill>
-                  <a:srgbClr val="111111"/>
-                </a:solidFill>
-                <a:latin typeface="Calibri" pitchFamily="34" charset="0"/>
-                <a:ea typeface="Calibri" pitchFamily="34" charset="-122"/>
-                <a:cs typeface="Calibri" pitchFamily="34" charset="-120"/>
-              </a:rPr>
-              <a:t>good applicants wrongly declined (225 of 1,271)</a:t>
-            </a:r>
-            <a:endParaRPr lang="en-US" sz="1300" dirty="0"/>
-          </a:p>
-        </p:txBody>
-      </p:sp>
-      <p:sp>
-        <p:nvSpPr>
-          <p:cNvPr id="11" name="Text 9"/>
-          <p:cNvSpPr txBox="1"/>
-          <p:nvPr/>
-        </p:nvSpPr>
-        <p:spPr>
-          <a:xfrm>
-            <a:off x="457200" y="2286000"/>
-            <a:ext cx="3977640" cy="1097280"/>
-          </a:xfrm>
-          <a:prstGeom prst="rect">
-            <a:avLst/>
-          </a:prstGeom>
-          <a:noFill/>
-          <a:ln/>
-        </p:spPr>
-        <p:txBody>
-          <a:bodyPr wrap="square" lIns="0" tIns="0" rIns="0" bIns="0" rtlCol="0" anchor="t"/>
-          <a:lstStyle/>
-          <a:p>
-            <a:pPr marL="0" indent="0">
-              <a:buNone/>
-            </a:pPr>
-            <a:r>
-              <a:rPr lang="en-US" sz="1400" dirty="0">
-                <a:solidFill>
-                  <a:srgbClr val="111111"/>
-                </a:solidFill>
-                <a:latin typeface="Calibri" pitchFamily="34" charset="0"/>
-                <a:ea typeface="Calibri" pitchFamily="34" charset="-122"/>
-                <a:cs typeface="Calibri" pitchFamily="34" charset="-120"/>
-              </a:rPr>
-              <a:t>Why 0.5 is not usable: nearly 1 in 5 creditworthy customers would be turned away. Declined precision 79.1%, recall 75.5%.</a:t>
-            </a:r>
-            <a:endParaRPr lang="en-US" sz="1400" dirty="0"/>
-          </a:p>
-        </p:txBody>
-      </p:sp>
-      <p:sp>
-        <p:nvSpPr>
-          <p:cNvPr id="12" name="Text 10"/>
-          <p:cNvSpPr txBox="1"/>
-          <p:nvPr/>
-        </p:nvSpPr>
-        <p:spPr>
-          <a:xfrm>
-            <a:off x="457200" y="3474720"/>
-            <a:ext cx="3977640" cy="1097280"/>
-          </a:xfrm>
-          <a:prstGeom prst="rect">
-            <a:avLst/>
-          </a:prstGeom>
-          <a:noFill/>
-          <a:ln/>
-        </p:spPr>
-        <p:txBody>
-          <a:bodyPr wrap="square" lIns="0" tIns="0" rIns="0" bIns="0" rtlCol="0" anchor="t"/>
-          <a:lstStyle/>
-          <a:p>
-            <a:pPr marL="0" indent="0">
-              <a:buNone/>
-            </a:pPr>
-            <a:r>
-              <a:rPr lang="en-US" sz="1400" dirty="0">
-                <a:solidFill>
-                  <a:srgbClr val="5F6B7A"/>
-                </a:solidFill>
-                <a:latin typeface="Calibri" pitchFamily="34" charset="0"/>
-                <a:ea typeface="Calibri" pitchFamily="34" charset="-122"/>
-                <a:cs typeface="Calibri" pitchFamily="34" charset="-120"/>
-              </a:rPr>
-              <a:t>Reads like the credit team: affordability, bureau score and repayment history lead; city tier and age barely matter.</a:t>
-            </a:r>
-            <a:endParaRPr lang="en-US" sz="1400" dirty="0"/>
-          </a:p>
-        </p:txBody>
-      </p:sp>
-      <p:graphicFrame>
-        <p:nvGraphicFramePr>
-          <p:cNvPr id="13" name="Chart 0"/>
-          <p:cNvGraphicFramePr/>
-          <p:nvPr/>
-        </p:nvGraphicFramePr>
-        <p:xfrm>
-          <a:off x="4663440" y="914400"/>
-          <a:ext cx="4114800" cy="3840480"/>
-        </p:xfrm>
-        <a:graphic>
-          <a:graphicData uri="http://schemas.openxmlformats.org/drawingml/2006/chart">
-            <c:chart xmlns:c="http://schemas.openxmlformats.org/drawingml/2006/chart" xmlns:r="http://schemas.openxmlformats.org/officeDocument/2006/relationships" r:id="rId3"/>
-          </a:graphicData>
-        </a:graphic>
-      </p:graphicFrame>
     </p:spTree>
   </p:cSld>
   <p:clrMapOvr>
